--- a/curso/pptx/S56.pptx
+++ b/curso/pptx/S56.pptx
@@ -4094,7 +4094,7 @@
                 </a:solidFill>
                 <a:latin typeface="Nunito Sans"/>
               </a:rPr>
-              <a:t>Busca la fuente:</a:t>
+              <a:t>查来源：</a:t>
             </a:r>
             <a:r>
               <a:rPr sz="2800" b="0">
@@ -4103,7 +4103,7 @@
                 </a:solidFill>
                 <a:latin typeface="Nunito Sans"/>
               </a:rPr>
-              <a:t> ¿existe ese libro, ese enlace, esa cita?</a:t>
+              <a:t>这本书、这个链接、这句引文真的存在吗？</a:t>
             </a:r>
           </a:p>
           <a:p>
@@ -4128,7 +4128,7 @@
                 </a:solidFill>
                 <a:latin typeface="Nunito Sans"/>
               </a:rPr>
-              <a:t>Lectura lateral:</a:t>
+              <a:t>横向阅读：</a:t>
             </a:r>
             <a:r>
               <a:rPr sz="2800" b="0">
@@ -4137,7 +4137,7 @@
                 </a:solidFill>
                 <a:latin typeface="Nunito Sans"/>
               </a:rPr>
-              <a:t> mira qué dicen otras fuentes fiables （第34课）.</a:t>
+              <a:t>看看其他可靠来源怎么说（第34课）。</a:t>
             </a:r>
           </a:p>
           <a:p>
@@ -4162,7 +4162,7 @@
                 </a:solidFill>
                 <a:latin typeface="Nunito Sans"/>
               </a:rPr>
-              <a:t>Datos y fechas:</a:t>
+              <a:t>数据和日期：</a:t>
             </a:r>
             <a:r>
               <a:rPr sz="2800" b="0">
@@ -4171,7 +4171,7 @@
                 </a:solidFill>
                 <a:latin typeface="Nunito Sans"/>
               </a:rPr>
-              <a:t> compruébalos siempre fuera de la IA.</a:t>
+              <a:t>一定要到人工智能之外去核实。</a:t>
             </a:r>
           </a:p>
           <a:p>
@@ -4196,7 +4196,7 @@
                 </a:solidFill>
                 <a:latin typeface="Nunito Sans"/>
               </a:rPr>
-              <a:t>Pide la fuente</a:t>
+              <a:t>向人工智能要来源</a:t>
             </a:r>
             <a:r>
               <a:rPr sz="2800" b="0">
@@ -4205,7 +4205,7 @@
                 </a:solidFill>
                 <a:latin typeface="Nunito Sans"/>
               </a:rPr>
-              <a:t> a la IA, y compruébala tú: también puede inventarla.</a:t>
+              <a:t>，然后你自己去核实：它也可能把来源编出来。</a:t>
             </a:r>
           </a:p>
         </p:txBody>
@@ -6951,7 +6951,7 @@
                 </a:solidFill>
                 <a:latin typeface="Nunito Sans"/>
               </a:rPr>
-              <a:t>Ha aprendido de muchísimos textos</a:t>
+              <a:t>它学习了大量的文字</a:t>
             </a:r>
           </a:p>
           <a:p>
@@ -6976,7 +6976,7 @@
                 </a:solidFill>
                 <a:latin typeface="Nunito Sans"/>
               </a:rPr>
-              <a:t>Acierta muchas veces, pero no siempre</a:t>
+              <a:t>它常常答对，但不总是答对</a:t>
             </a:r>
           </a:p>
           <a:p>
@@ -7001,7 +7001,7 @@
                 </a:solidFill>
                 <a:latin typeface="Nunito Sans"/>
               </a:rPr>
-              <a:t>¿Entiende lo que dice? Los expertos lo discuten</a:t>
+              <a:t>它理解自己说的话吗？专家们对此还有争论</a:t>
             </a:r>
           </a:p>
           <a:p>
@@ -7026,7 +7026,7 @@
                 </a:solidFill>
                 <a:latin typeface="Nunito Sans"/>
               </a:rPr>
-              <a:t>Suena igual de segura cuando acierta y cuando falla</a:t>
+              <a:t>答对的时候和答错的时候，听起来一样有把握</a:t>
             </a:r>
           </a:p>
         </p:txBody>
@@ -7260,7 +7260,7 @@
                 </a:solidFill>
                 <a:latin typeface="Nunito Sans"/>
               </a:rPr>
-              <a:t>Inventa datos, citas y hasta fuentes</a:t>
+              <a:t>编造数据、引文，甚至来源</a:t>
             </a:r>
           </a:p>
           <a:p>
@@ -7285,7 +7285,7 @@
                 </a:solidFill>
                 <a:latin typeface="Nunito Sans"/>
               </a:rPr>
-              <a:t>Se equivoca con total seguridad</a:t>
+              <a:t>十分自信地出错</a:t>
             </a:r>
           </a:p>
           <a:p>
@@ -7310,7 +7310,7 @@
                 </a:solidFill>
                 <a:latin typeface="Nunito Sans"/>
               </a:rPr>
-              <a:t>A veces te da la razón sin tenerla</a:t>
+              <a:t>有时没有道理也附和你</a:t>
             </a:r>
           </a:p>
           <a:p>
@@ -7335,7 +7335,7 @@
                 </a:solidFill>
                 <a:latin typeface="Nunito Sans"/>
               </a:rPr>
-              <a:t>Puede no estar al día</a:t>
+              <a:t>可能不是最新的</a:t>
             </a:r>
           </a:p>
         </p:txBody>
@@ -7465,7 +7465,7 @@
                 </a:solidFill>
                 <a:latin typeface="Nunito Sans"/>
               </a:rPr>
-              <a:t>Explicar algo con otras palabras</a:t>
+              <a:t>用别的说法解释一件事</a:t>
             </a:r>
           </a:p>
           <a:p>
@@ -7490,7 +7490,7 @@
                 </a:solidFill>
                 <a:latin typeface="Nunito Sans"/>
               </a:rPr>
-              <a:t>Hacer esquemas y resúmenes</a:t>
+              <a:t>做提纲和摘要</a:t>
             </a:r>
           </a:p>
           <a:p>
@@ -7515,7 +7515,7 @@
                 </a:solidFill>
                 <a:latin typeface="Nunito Sans"/>
               </a:rPr>
-              <a:t>Dar ideas para empezar</a:t>
+              <a:t>给出开头的想法</a:t>
             </a:r>
           </a:p>
           <a:p>
@@ -7540,7 +7540,7 @@
                 </a:solidFill>
                 <a:latin typeface="Nunito Sans"/>
               </a:rPr>
-              <a:t>Revisar la ortografía</a:t>
+              <a:t>检查拼写</a:t>
             </a:r>
           </a:p>
         </p:txBody>
@@ -7774,7 +7774,7 @@
                 </a:solidFill>
                 <a:latin typeface="Nunito Sans"/>
               </a:rPr>
-              <a:t>No miente a propósito: escribe lo que suena probable</a:t>
+              <a:t>它不是故意说谎：它写的是听起来可能的内容</a:t>
             </a:r>
           </a:p>
           <a:p>
@@ -7799,7 +7799,7 @@
                 </a:solidFill>
                 <a:latin typeface="Nunito Sans"/>
               </a:rPr>
-              <a:t>Por eso suena igual de segura</a:t>
+              <a:t>所以它听起来同样有把握</a:t>
             </a:r>
           </a:p>
           <a:p>
@@ -7824,7 +7824,7 @@
                 </a:solidFill>
                 <a:latin typeface="Nunito Sans"/>
               </a:rPr>
-              <a:t>Sentirse seguro no es saber （第3课）</a:t>
+              <a:t>觉得有把握不等于知道（第3课）</a:t>
             </a:r>
           </a:p>
         </p:txBody>

--- a/curso/pptx/S56.pptx
+++ b/curso/pptx/S56.pptx
@@ -4309,7 +4309,7 @@
                 </a:solidFill>
                 <a:latin typeface="Fredoka"/>
               </a:rPr>
-              <a:t>案例1 · 奥马尔的书</a:t>
+              <a:t>案例1 · 一个男孩的书</a:t>
             </a:r>
           </a:p>
         </p:txBody>
@@ -4391,7 +4391,7 @@
                 </a:solidFill>
                 <a:latin typeface="Nunito Sans"/>
               </a:rPr>
-              <a:t>人工智能给奥马尔推荐了三本关于毕尔巴鄂竞技历史的书，有书名、作者和年份。</a:t>
+              <a:t>人工智能给一个男孩推荐了三本关于毕尔巴鄂竞技历史的书，有书名、作者和年份。</a:t>
             </a:r>
           </a:p>
         </p:txBody>
@@ -4618,7 +4618,7 @@
                 </a:solidFill>
                 <a:latin typeface="Fredoka"/>
               </a:rPr>
-              <a:t>案例2 · 娜亚拉的光合作用</a:t>
+              <a:t>案例2 · 一个女孩的光合作用</a:t>
             </a:r>
           </a:p>
         </p:txBody>
@@ -4700,7 +4700,7 @@
                 </a:solidFill>
                 <a:latin typeface="Nunito Sans"/>
               </a:rPr>
-              <a:t>娜亚拉不理解光合作用。她让人工智能用简单的话给她解释，然后拿它和自己的生物课本对照。</a:t>
+              <a:t>一个女孩不理解光合作用。她让人工智能用简单的话给她解释，然后拿它和自己的生物课本对照。</a:t>
             </a:r>
           </a:p>
         </p:txBody>
@@ -5009,7 +5009,7 @@
                 </a:solidFill>
                 <a:latin typeface="Nunito Sans"/>
               </a:rPr>
-              <a:t>人工智能告诉陈，毕尔巴鄂古根海姆博物馆于1997年开馆。他的朋友说：“这是人工智能说的，肯定是假的。”</a:t>
+              <a:t>人工智能告诉一个男孩，毕尔巴鄂古根海姆博物馆于1997年开馆。他的朋友说：“这是人工智能说的，肯定是假的。”</a:t>
             </a:r>
           </a:p>
         </p:txBody>
@@ -5107,7 +5107,7 @@
                 </a:solidFill>
                 <a:latin typeface="Nunito Sans"/>
               </a:rPr>
-              <a:t>陈到博物馆的网站上查：它确实是1997年开馆的。这是真的。</a:t>
+              <a:t>这个男孩到博物馆的网站上查：它确实是1997年开馆的。这是真的。</a:t>
             </a:r>
           </a:p>
           <a:p>
@@ -6574,7 +6574,7 @@
                 </a:solidFill>
                 <a:latin typeface="Nunito Sans"/>
               </a:rPr>
-              <a:t>奥马尔让一个人工智能为一项作业推荐三本关于毕尔巴鄂竞技历史的书。人工智能给出了书名、作者和年份。其中两本书并不存在。</a:t>
+              <a:t>一个男孩让一个人工智能为一项作业推荐三本关于毕尔巴鄂竞技历史的书。人工智能给出了书名、作者和年份。其中两本书并不存在。</a:t>
             </a:r>
           </a:p>
         </p:txBody>
@@ -6613,7 +6613,7 @@
                 </a:solidFill>
                 <a:latin typeface="Nunito Sans"/>
               </a:rPr>
-              <a:t>奥马尔在交作业之前，本来可以怎样发现这一点？</a:t>
+              <a:t>这个男孩在交作业之前，本来可以怎样发现这一点？</a:t>
             </a:r>
           </a:p>
         </p:txBody>
